--- a/slides/cascade_review.pptx
+++ b/slides/cascade_review.pptx
@@ -4099,8 +4099,8 @@
         </p:nvSpPr>
         <p:spPr>
           <a:xfrm>
-            <a:off x="6513137" y="1938528"/>
-            <a:ext cx="4621646" cy="3803904"/>
+            <a:off x="6464808" y="1938528"/>
+            <a:ext cx="4718304" cy="3803904"/>
           </a:xfrm>
           <a:prstGeom prst="roundRect">
             <a:avLst>
@@ -4141,8 +4141,8 @@
         </p:blipFill>
         <p:spPr>
           <a:xfrm>
-            <a:off x="6586289" y="2011680"/>
-            <a:ext cx="4475342" cy="3657600"/>
+            <a:off x="6537960" y="2011680"/>
+            <a:ext cx="4572000" cy="3657600"/>
           </a:xfrm>
           <a:prstGeom prst="rect">
             <a:avLst/>
@@ -7376,8 +7376,8 @@
         </p:nvSpPr>
         <p:spPr>
           <a:xfrm>
-            <a:off x="813917" y="2029968"/>
-            <a:ext cx="6510327" cy="4032504"/>
+            <a:off x="819296" y="2029968"/>
+            <a:ext cx="6499568" cy="4032504"/>
           </a:xfrm>
           <a:prstGeom prst="roundRect">
             <a:avLst>
@@ -7418,8 +7418,8 @@
         </p:blipFill>
         <p:spPr>
           <a:xfrm>
-            <a:off x="887069" y="2103120"/>
-            <a:ext cx="6364023" cy="3886200"/>
+            <a:off x="892448" y="2103120"/>
+            <a:ext cx="6353264" cy="3886200"/>
           </a:xfrm>
           <a:prstGeom prst="rect">
             <a:avLst/>
@@ -7840,8 +7840,8 @@
         </p:nvSpPr>
         <p:spPr>
           <a:xfrm>
-            <a:off x="1450436" y="2121408"/>
-            <a:ext cx="9288080" cy="3392424"/>
+            <a:off x="1387821" y="2121408"/>
+            <a:ext cx="9413310" cy="3392424"/>
           </a:xfrm>
           <a:prstGeom prst="roundRect">
             <a:avLst>
@@ -7882,8 +7882,8 @@
         </p:blipFill>
         <p:spPr>
           <a:xfrm>
-            <a:off x="1523588" y="2194560"/>
-            <a:ext cx="9141776" cy="3246120"/>
+            <a:off x="1460973" y="2194560"/>
+            <a:ext cx="9267006" cy="3246120"/>
           </a:xfrm>
           <a:prstGeom prst="rect">
             <a:avLst/>
@@ -11390,7 +11390,7 @@
                 <a:ea typeface="Calibri" pitchFamily="34" charset="-122"/>
                 <a:cs typeface="Calibri" pitchFamily="34" charset="-120"/>
               </a:rPr>
-              <a:t>Voltage-ratio (purple) peaks at 2.2× near the deadzone; the RPM-ratio (green) stays far lower — the asymmetry is in the driver, not the motor.</a:t>
+              <a:t>Fig 3.4 — Voltage-ratio (driver, amber) peaks at 2.2× near the deadzone; the RPM-ratio (motor, teal) stays far lower — the asymmetry is in the driver, not the motor.</a:t>
             </a:r>
             <a:endParaRPr lang="en-US" sz="1050" dirty="0"/>
           </a:p>
@@ -12671,8 +12671,8 @@
         </p:nvSpPr>
         <p:spPr>
           <a:xfrm>
-            <a:off x="1872606" y="2852928"/>
-            <a:ext cx="8443741" cy="3209544"/>
+            <a:off x="1823476" y="2852928"/>
+            <a:ext cx="8542000" cy="3209544"/>
           </a:xfrm>
           <a:prstGeom prst="roundRect">
             <a:avLst>
@@ -12713,8 +12713,8 @@
         </p:blipFill>
         <p:spPr>
           <a:xfrm>
-            <a:off x="1945758" y="2926080"/>
-            <a:ext cx="8297437" cy="3063240"/>
+            <a:off x="1896628" y="2926080"/>
+            <a:ext cx="8395696" cy="3063240"/>
           </a:xfrm>
           <a:prstGeom prst="rect">
             <a:avLst/>
@@ -13375,7 +13375,7 @@
                 <a:ea typeface="Calibri" pitchFamily="34" charset="-122"/>
                 <a:cs typeface="Calibri" pitchFamily="34" charset="-120"/>
               </a:rPr>
-              <a:t>LOOCV RMSE vs in-sample floor. Left (cool session): accel excess +1.06. Right (warm session): accel excess collapses to −0.05 — the cold-start hypothesis, confirmed. No held-out set ever existed → LOOCV is the honest estimator.</a:t>
+              <a:t>Fig 5.2 — LOOCV RMSE vs in-sample floor. Left (cool session): accel excess +1.06. Right (warm session): accel excess collapses to −0.05 — the cold-start hypothesis, confirmed. No held-out set ever existed → LOOCV is the honest estimator.</a:t>
             </a:r>
             <a:endParaRPr lang="en-US" sz="1050" dirty="0"/>
           </a:p>
